--- a/templates/carousels/posts/16-10-2026-fri-did-you-know.pptx
+++ b/templates/carousels/posts/16-10-2026-fri-did-you-know.pptx
@@ -3827,7 +3827,7 @@
       <p:grpSpPr/>
       <p:pic>
         <p:nvPicPr>
-          <p:cNvPr id="2" name="Picture 1" descr="4811908494538235881.jpg"/>
+          <p:cNvPr id="2" name="Picture 1" descr="8754755242079003085.jpg"/>
           <p:cNvPicPr>
             <a:picLocks noChangeAspect="1"/>
           </p:cNvPicPr>
@@ -3875,7 +3875,7 @@
             <a:r>
               <a:rPr sz="3000" b="1" i="0">
                 <a:solidFill>
-                  <a:srgbClr val="DBE6A7"/>
+                  <a:srgbClr val="B1BCB1"/>
                 </a:solidFill>
                 <a:latin typeface="Montserrat"/>
               </a:rPr>
@@ -3925,7 +3925,7 @@
       </p:sp>
       <p:pic>
         <p:nvPicPr>
-          <p:cNvPr id="5" name="Picture 4" descr="st2639853730536920197.png"/>
+          <p:cNvPr id="5" name="Picture 4" descr="st2558467560971008754.png"/>
           <p:cNvPicPr>
             <a:picLocks noChangeAspect="1"/>
           </p:cNvPicPr>
@@ -3973,7 +3973,7 @@
             <a:r>
               <a:rPr sz="3000" b="1" i="0">
                 <a:solidFill>
-                  <a:srgbClr val="DBE6A7"/>
+                  <a:srgbClr val="B1BCB1"/>
                 </a:solidFill>
                 <a:latin typeface="Montserrat"/>
               </a:rPr>
@@ -3997,7 +3997,7 @@
             <a:avLst/>
           </a:prstGeom>
           <a:solidFill>
-            <a:srgbClr val="DBE6A7"/>
+            <a:srgbClr val="B1BCB1"/>
           </a:solidFill>
           <a:ln>
             <a:noFill/>
@@ -4041,7 +4041,7 @@
             <a:avLst/>
           </a:prstGeom>
           <a:solidFill>
-            <a:srgbClr val="22371F"/>
+            <a:srgbClr val="1E3F1D"/>
           </a:solidFill>
           <a:ln>
             <a:noFill/>
@@ -4085,7 +4085,7 @@
             <a:avLst/>
           </a:prstGeom>
           <a:solidFill>
-            <a:srgbClr val="22371F"/>
+            <a:srgbClr val="1E3F1D"/>
           </a:solidFill>
           <a:ln>
             <a:noFill/>
@@ -4129,7 +4129,7 @@
             <a:avLst/>
           </a:prstGeom>
           <a:solidFill>
-            <a:srgbClr val="22371F"/>
+            <a:srgbClr val="1E3F1D"/>
           </a:solidFill>
           <a:ln>
             <a:noFill/>
@@ -4173,7 +4173,7 @@
             <a:avLst/>
           </a:prstGeom>
           <a:solidFill>
-            <a:srgbClr val="22371F"/>
+            <a:srgbClr val="1E3F1D"/>
           </a:solidFill>
           <a:ln>
             <a:noFill/>
@@ -4216,7 +4216,7 @@
     <p:bg>
       <p:bgPr>
         <a:solidFill>
-          <a:srgbClr val="F4F1EA"/>
+          <a:srgbClr val="F3F1EA"/>
         </a:solidFill>
         <a:effectLst/>
       </p:bgPr>
@@ -4254,7 +4254,7 @@
             <a:r>
               <a:rPr sz="3000" b="1" i="0">
                 <a:solidFill>
-                  <a:srgbClr val="156826"/>
+                  <a:srgbClr val="31662F"/>
                 </a:solidFill>
                 <a:latin typeface="Montserrat"/>
               </a:rPr>
@@ -4282,7 +4282,7 @@
           </a:solidFill>
           <a:ln w="28575">
             <a:solidFill>
-              <a:srgbClr val="A7B097"/>
+              <a:srgbClr val="B1BCB1"/>
             </a:solidFill>
           </a:ln>
           <a:effectLst/>
@@ -4386,7 +4386,7 @@
             <a:r>
               <a:rPr sz="5700" b="0" i="0">
                 <a:solidFill>
-                  <a:srgbClr val="22371F"/>
+                  <a:srgbClr val="1E3F1D"/>
                 </a:solidFill>
                 <a:latin typeface="EB Garamond"/>
               </a:rPr>
@@ -4432,7 +4432,7 @@
       </p:sp>
       <p:pic>
         <p:nvPicPr>
-          <p:cNvPr id="7" name="Picture 6" descr="st282452605729079137.png"/>
+          <p:cNvPr id="7" name="Picture 6" descr="st7144803508716543224.png"/>
           <p:cNvPicPr>
             <a:picLocks noChangeAspect="1"/>
           </p:cNvPicPr>
@@ -4504,7 +4504,7 @@
             <a:avLst/>
           </a:prstGeom>
           <a:solidFill>
-            <a:srgbClr val="A7B097"/>
+            <a:srgbClr val="B1BCB1"/>
           </a:solidFill>
           <a:ln>
             <a:noFill/>
@@ -4548,7 +4548,7 @@
             <a:avLst/>
           </a:prstGeom>
           <a:solidFill>
-            <a:srgbClr val="156826"/>
+            <a:srgbClr val="31662F"/>
           </a:solidFill>
           <a:ln>
             <a:noFill/>
@@ -4592,7 +4592,7 @@
             <a:avLst/>
           </a:prstGeom>
           <a:solidFill>
-            <a:srgbClr val="A7B097"/>
+            <a:srgbClr val="B1BCB1"/>
           </a:solidFill>
           <a:ln>
             <a:noFill/>
@@ -4636,7 +4636,7 @@
             <a:avLst/>
           </a:prstGeom>
           <a:solidFill>
-            <a:srgbClr val="A7B097"/>
+            <a:srgbClr val="B1BCB1"/>
           </a:solidFill>
           <a:ln>
             <a:noFill/>
@@ -4680,7 +4680,7 @@
             <a:avLst/>
           </a:prstGeom>
           <a:solidFill>
-            <a:srgbClr val="A7B097"/>
+            <a:srgbClr val="B1BCB1"/>
           </a:solidFill>
           <a:ln>
             <a:noFill/>
@@ -4723,7 +4723,7 @@
     <p:bg>
       <p:bgPr>
         <a:solidFill>
-          <a:srgbClr val="F4F1EA"/>
+          <a:srgbClr val="F3F1EA"/>
         </a:solidFill>
         <a:effectLst/>
       </p:bgPr>
@@ -4761,7 +4761,7 @@
             <a:r>
               <a:rPr sz="3000" b="1" i="0">
                 <a:solidFill>
-                  <a:srgbClr val="156826"/>
+                  <a:srgbClr val="31662F"/>
                 </a:solidFill>
                 <a:latin typeface="Montserrat"/>
               </a:rPr>
@@ -4789,7 +4789,7 @@
           </a:solidFill>
           <a:ln w="28575">
             <a:solidFill>
-              <a:srgbClr val="A7B097"/>
+              <a:srgbClr val="B1BCB1"/>
             </a:solidFill>
           </a:ln>
           <a:effectLst/>
@@ -4893,7 +4893,7 @@
             <a:r>
               <a:rPr sz="5700" b="0" i="0">
                 <a:solidFill>
-                  <a:srgbClr val="22371F"/>
+                  <a:srgbClr val="1E3F1D"/>
                 </a:solidFill>
                 <a:latin typeface="EB Garamond"/>
               </a:rPr>
@@ -4939,7 +4939,7 @@
       </p:sp>
       <p:pic>
         <p:nvPicPr>
-          <p:cNvPr id="7" name="Picture 6" descr="st7206700200716447276.png"/>
+          <p:cNvPr id="7" name="Picture 6" descr="st2523896290647565520.png"/>
           <p:cNvPicPr>
             <a:picLocks noChangeAspect="1"/>
           </p:cNvPicPr>
@@ -5011,7 +5011,7 @@
             <a:avLst/>
           </a:prstGeom>
           <a:solidFill>
-            <a:srgbClr val="A7B097"/>
+            <a:srgbClr val="B1BCB1"/>
           </a:solidFill>
           <a:ln>
             <a:noFill/>
@@ -5055,7 +5055,7 @@
             <a:avLst/>
           </a:prstGeom>
           <a:solidFill>
-            <a:srgbClr val="A7B097"/>
+            <a:srgbClr val="B1BCB1"/>
           </a:solidFill>
           <a:ln>
             <a:noFill/>
@@ -5099,7 +5099,7 @@
             <a:avLst/>
           </a:prstGeom>
           <a:solidFill>
-            <a:srgbClr val="156826"/>
+            <a:srgbClr val="31662F"/>
           </a:solidFill>
           <a:ln>
             <a:noFill/>
@@ -5143,7 +5143,7 @@
             <a:avLst/>
           </a:prstGeom>
           <a:solidFill>
-            <a:srgbClr val="A7B097"/>
+            <a:srgbClr val="B1BCB1"/>
           </a:solidFill>
           <a:ln>
             <a:noFill/>
@@ -5187,7 +5187,7 @@
             <a:avLst/>
           </a:prstGeom>
           <a:solidFill>
-            <a:srgbClr val="A7B097"/>
+            <a:srgbClr val="B1BCB1"/>
           </a:solidFill>
           <a:ln>
             <a:noFill/>
@@ -5230,7 +5230,7 @@
     <p:bg>
       <p:bgPr>
         <a:solidFill>
-          <a:srgbClr val="F4F1EA"/>
+          <a:srgbClr val="F3F1EA"/>
         </a:solidFill>
         <a:effectLst/>
       </p:bgPr>
@@ -5268,7 +5268,7 @@
             <a:r>
               <a:rPr sz="3000" b="1" i="0">
                 <a:solidFill>
-                  <a:srgbClr val="156826"/>
+                  <a:srgbClr val="31662F"/>
                 </a:solidFill>
                 <a:latin typeface="Montserrat"/>
               </a:rPr>
@@ -5296,7 +5296,7 @@
           </a:solidFill>
           <a:ln w="28575">
             <a:solidFill>
-              <a:srgbClr val="A7B097"/>
+              <a:srgbClr val="B1BCB1"/>
             </a:solidFill>
           </a:ln>
           <a:effectLst/>
@@ -5400,7 +5400,7 @@
             <a:r>
               <a:rPr sz="5700" b="0" i="0">
                 <a:solidFill>
-                  <a:srgbClr val="22371F"/>
+                  <a:srgbClr val="1E3F1D"/>
                 </a:solidFill>
                 <a:latin typeface="EB Garamond"/>
               </a:rPr>
@@ -5446,7 +5446,7 @@
       </p:sp>
       <p:pic>
         <p:nvPicPr>
-          <p:cNvPr id="7" name="Picture 6" descr="st7130489339427790111.png"/>
+          <p:cNvPr id="7" name="Picture 6" descr="st4750798945456173185.png"/>
           <p:cNvPicPr>
             <a:picLocks noChangeAspect="1"/>
           </p:cNvPicPr>
@@ -5518,7 +5518,7 @@
             <a:avLst/>
           </a:prstGeom>
           <a:solidFill>
-            <a:srgbClr val="A7B097"/>
+            <a:srgbClr val="B1BCB1"/>
           </a:solidFill>
           <a:ln>
             <a:noFill/>
@@ -5562,7 +5562,7 @@
             <a:avLst/>
           </a:prstGeom>
           <a:solidFill>
-            <a:srgbClr val="A7B097"/>
+            <a:srgbClr val="B1BCB1"/>
           </a:solidFill>
           <a:ln>
             <a:noFill/>
@@ -5606,7 +5606,7 @@
             <a:avLst/>
           </a:prstGeom>
           <a:solidFill>
-            <a:srgbClr val="A7B097"/>
+            <a:srgbClr val="B1BCB1"/>
           </a:solidFill>
           <a:ln>
             <a:noFill/>
@@ -5650,7 +5650,7 @@
             <a:avLst/>
           </a:prstGeom>
           <a:solidFill>
-            <a:srgbClr val="156826"/>
+            <a:srgbClr val="31662F"/>
           </a:solidFill>
           <a:ln>
             <a:noFill/>
@@ -5694,7 +5694,7 @@
             <a:avLst/>
           </a:prstGeom>
           <a:solidFill>
-            <a:srgbClr val="A7B097"/>
+            <a:srgbClr val="B1BCB1"/>
           </a:solidFill>
           <a:ln>
             <a:noFill/>
@@ -5737,7 +5737,7 @@
     <p:bg>
       <p:bgPr>
         <a:solidFill>
-          <a:srgbClr val="22371F"/>
+          <a:srgbClr val="1E3F1D"/>
         </a:solidFill>
         <a:effectLst/>
       </p:bgPr>
@@ -5775,7 +5775,7 @@
             <a:r>
               <a:rPr sz="3000" b="1" i="0">
                 <a:solidFill>
-                  <a:srgbClr val="DBE6A7"/>
+                  <a:srgbClr val="B1BCB1"/>
                 </a:solidFill>
                 <a:latin typeface="Montserrat"/>
               </a:rPr>
@@ -5849,7 +5849,7 @@
             <a:r>
               <a:rPr sz="5700" b="0" i="1">
                 <a:solidFill>
-                  <a:srgbClr val="DBE6A7"/>
+                  <a:srgbClr val="B1BCB1"/>
                 </a:solidFill>
                 <a:latin typeface="EB Garamond"/>
               </a:rPr>
@@ -5860,7 +5860,7 @@
       </p:sp>
       <p:pic>
         <p:nvPicPr>
-          <p:cNvPr id="5" name="Picture 4" descr="st8191692115093855546.png"/>
+          <p:cNvPr id="5" name="Picture 4" descr="st7730167352228561430.png"/>
           <p:cNvPicPr>
             <a:picLocks noChangeAspect="1"/>
           </p:cNvPicPr>
@@ -5908,7 +5908,7 @@
             <a:r>
               <a:rPr sz="3000" b="1" i="0">
                 <a:solidFill>
-                  <a:srgbClr val="A7B097"/>
+                  <a:srgbClr val="B1BCB1"/>
                 </a:solidFill>
                 <a:latin typeface="Montserrat"/>
               </a:rPr>
@@ -6108,7 +6108,7 @@
             <a:avLst/>
           </a:prstGeom>
           <a:solidFill>
-            <a:srgbClr val="DBE6A7"/>
+            <a:srgbClr val="B1BCB1"/>
           </a:solidFill>
           <a:ln>
             <a:noFill/>
